--- a/nepesseg2025.pptx
+++ b/nepesseg2025.pptx
@@ -1912,7 +1912,7 @@
             </a:pPr>
             <a:fld id="{BCC18F51-09EC-435C-A3BA-64A766E099C0}" type="datetimeFigureOut">
               <a:rPr lang="en-US"/>
-              <a:t>9/17/2026</a:t>
+              <a:t>9/18/2026</a:t>
             </a:fld>
             <a:endParaRPr/>
           </a:p>
@@ -2103,7 +2103,7 @@
             </a:pPr>
             <a:fld id="{BCC18F51-09EC-435C-A3BA-64A766E099C0}" type="datetimeFigureOut">
               <a:rPr lang="en-US"/>
-              <a:t>9/17/2026</a:t>
+              <a:t>9/18/2026</a:t>
             </a:fld>
             <a:endParaRPr/>
           </a:p>
@@ -2304,7 +2304,7 @@
             </a:pPr>
             <a:fld id="{BCC18F51-09EC-435C-A3BA-64A766E099C0}" type="datetimeFigureOut">
               <a:rPr lang="en-US"/>
-              <a:t>9/17/2026</a:t>
+              <a:t>9/18/2026</a:t>
             </a:fld>
             <a:endParaRPr/>
           </a:p>
@@ -2515,7 +2515,7 @@
             </a:pPr>
             <a:fld id="{BCC18F51-09EC-435C-A3BA-64A766E099C0}" type="datetimeFigureOut">
               <a:rPr lang="en-US"/>
-              <a:t>9/17/2026</a:t>
+              <a:t>9/18/2026</a:t>
             </a:fld>
             <a:endParaRPr/>
           </a:p>
@@ -2847,7 +2847,7 @@
             </a:pPr>
             <a:fld id="{BCC18F51-09EC-435C-A3BA-64A766E099C0}" type="datetimeFigureOut">
               <a:rPr lang="en-US"/>
-              <a:t>9/17/2026</a:t>
+              <a:t>9/18/2026</a:t>
             </a:fld>
             <a:endParaRPr/>
           </a:p>
@@ -3124,7 +3124,7 @@
             </a:pPr>
             <a:fld id="{BCC18F51-09EC-435C-A3BA-64A766E099C0}" type="datetimeFigureOut">
               <a:rPr lang="en-US"/>
-              <a:t>9/17/2026</a:t>
+              <a:t>9/18/2026</a:t>
             </a:fld>
             <a:endParaRPr/>
           </a:p>
@@ -3538,7 +3538,7 @@
             </a:pPr>
             <a:fld id="{BCC18F51-09EC-435C-A3BA-64A766E099C0}" type="datetimeFigureOut">
               <a:rPr lang="en-US"/>
-              <a:t>9/17/2026</a:t>
+              <a:t>9/18/2026</a:t>
             </a:fld>
             <a:endParaRPr/>
           </a:p>
@@ -3860,7 +3860,7 @@
             </a:pPr>
             <a:fld id="{BCC18F51-09EC-435C-A3BA-64A766E099C0}" type="datetimeFigureOut">
               <a:rPr lang="en-US"/>
-              <a:t>9/17/2026</a:t>
+              <a:t>9/18/2026</a:t>
             </a:fld>
             <a:endParaRPr/>
           </a:p>
@@ -4025,7 +4025,7 @@
             </a:pPr>
             <a:fld id="{BCC18F51-09EC-435C-A3BA-64A766E099C0}" type="datetimeFigureOut">
               <a:rPr lang="en-US"/>
-              <a:t>9/17/2026</a:t>
+              <a:t>9/18/2026</a:t>
             </a:fld>
             <a:endParaRPr/>
           </a:p>
@@ -4136,7 +4136,7 @@
             </a:pPr>
             <a:fld id="{BCC18F51-09EC-435C-A3BA-64A766E099C0}" type="datetimeFigureOut">
               <a:rPr lang="en-US"/>
-              <a:t>9/17/2026</a:t>
+              <a:t>9/18/2026</a:t>
             </a:fld>
             <a:endParaRPr/>
           </a:p>
@@ -4435,7 +4435,7 @@
             </a:pPr>
             <a:fld id="{BCC18F51-09EC-435C-A3BA-64A766E099C0}" type="datetimeFigureOut">
               <a:rPr lang="en-US"/>
-              <a:t>9/17/2026</a:t>
+              <a:t>9/18/2026</a:t>
             </a:fld>
             <a:endParaRPr/>
           </a:p>
@@ -4815,7 +4815,7 @@
             </a:pPr>
             <a:fld id="{BCC18F51-09EC-435C-A3BA-64A766E099C0}" type="datetimeFigureOut">
               <a:rPr lang="en-US"/>
-              <a:t>9/17/2026</a:t>
+              <a:t>9/18/2026</a:t>
             </a:fld>
             <a:endParaRPr/>
           </a:p>
@@ -5251,7 +5251,7 @@
         </p:spPr>
         <p:txBody>
           <a:bodyPr vertOverflow="overflow" horzOverflow="overflow" vert="horz" wrap="square" lIns="91440" tIns="45720" rIns="91440" bIns="45720" numCol="1" spcCol="0" rtlCol="0" fromWordArt="0" anchor="b" anchorCtr="0" forceAA="0" compatLnSpc="0">
-            <a:normAutofit fontScale="95000" lnSpcReduction="1000"/>
+            <a:normAutofit fontScale="95000"/>
           </a:bodyPr>
           <a:lstStyle/>
           <a:p>
@@ -5531,6 +5531,7 @@
       <p:sp>
         <p:nvSpPr>
           <p:cNvPr id="10" name="Szövegdoboz 9">
+            <a:hlinkClick r:id="rId3" action="ppaction://hlinksldjump"/>
             <a:extLst>
               <a:ext uri="{FF2B5EF4-FFF2-40B4-BE49-F238E27FC236}">
                 <a16:creationId xmlns:a16="http://schemas.microsoft.com/office/drawing/2014/main" id="{A5EB3010-3BA7-6964-7F31-004EE9D8D410}"/>
@@ -5576,31 +5577,20 @@
               <a:buAutoNum type="arabicPeriod"/>
             </a:pPr>
             <a:r>
-              <a:rPr lang="hu-HU" sz="3600" i="1">
+              <a:rPr lang="hu-HU" sz="3600" i="1" dirty="0">
                 <a:solidFill>
                   <a:schemeClr val="bg1"/>
                 </a:solidFill>
-                <a:hlinkClick r:id="rId3" action="ppaction://hlinksldjump">
-                  <a:extLst>
-                    <a:ext uri="{A12FA001-AC4F-418D-AE19-62706E023703}">
-                      <ahyp:hlinkClr xmlns:ahyp="http://schemas.microsoft.com/office/drawing/2018/hyperlinkcolor" val="tx"/>
-                    </a:ext>
-                  </a:extLst>
-                </a:hlinkClick>
               </a:rPr>
               <a:t>Megye adatai</a:t>
             </a:r>
-            <a:endParaRPr lang="hu-HU" sz="3600" i="1">
-              <a:solidFill>
-                <a:schemeClr val="bg1"/>
-              </a:solidFill>
-            </a:endParaRPr>
           </a:p>
         </p:txBody>
       </p:sp>
       <p:sp>
         <p:nvSpPr>
           <p:cNvPr id="16" name="Szövegdoboz 15">
+            <a:hlinkClick r:id="rId4" action="ppaction://hlinksldjump"/>
             <a:extLst>
               <a:ext uri="{FF2B5EF4-FFF2-40B4-BE49-F238E27FC236}">
                 <a16:creationId xmlns:a16="http://schemas.microsoft.com/office/drawing/2014/main" id="{DB9CC4AC-90E4-74AE-1B7F-6BBEBE4B16E2}"/>
@@ -5643,29 +5633,15 @@
           <a:lstStyle/>
           <a:p>
             <a:r>
-              <a:rPr lang="hu-HU" sz="3600" i="1" u="sng">
+              <a:rPr lang="hu-HU" sz="3600" dirty="0">
                 <a:solidFill>
                   <a:schemeClr val="bg1">
                     <a:lumMod val="95000"/>
                   </a:schemeClr>
                 </a:solidFill>
-                <a:hlinkClick r:id="rId4" action="ppaction://hlinksldjump">
-                  <a:extLst>
-                    <a:ext uri="{A12FA001-AC4F-418D-AE19-62706E023703}">
-                      <ahyp:hlinkClr xmlns:ahyp="http://schemas.microsoft.com/office/drawing/2018/hyperlinkcolor" val="tx"/>
-                    </a:ext>
-                  </a:extLst>
-                </a:hlinkClick>
               </a:rPr>
               <a:t>2. Település típusai</a:t>
             </a:r>
-            <a:endParaRPr lang="hu-HU" sz="3600" i="1" u="sng">
-              <a:solidFill>
-                <a:schemeClr val="bg1">
-                  <a:lumMod val="95000"/>
-                </a:schemeClr>
-              </a:solidFill>
-            </a:endParaRPr>
           </a:p>
         </p:txBody>
       </p:sp>
@@ -5846,6 +5822,229 @@
       </p:transition>
     </mc:Fallback>
   </mc:AlternateContent>
+  <p:timing>
+    <p:tnLst>
+      <p:par>
+        <p:cTn id="1" dur="indefinite" restart="never" nodeType="tmRoot">
+          <p:childTnLst>
+            <p:seq concurrent="1" nextAc="seek">
+              <p:cTn id="2" dur="indefinite" nodeType="mainSeq">
+                <p:childTnLst>
+                  <p:par>
+                    <p:cTn id="3" fill="hold">
+                      <p:stCondLst>
+                        <p:cond delay="indefinite"/>
+                        <p:cond evt="onBegin" delay="0">
+                          <p:tn val="2"/>
+                        </p:cond>
+                      </p:stCondLst>
+                      <p:childTnLst>
+                        <p:par>
+                          <p:cTn id="4" fill="hold">
+                            <p:stCondLst>
+                              <p:cond delay="0"/>
+                            </p:stCondLst>
+                            <p:childTnLst>
+                              <p:par>
+                                <p:cTn id="5" presetID="32" presetClass="emph" presetSubtype="0" repeatCount="indefinite" fill="hold" grpId="0" nodeType="afterEffect">
+                                  <p:stCondLst>
+                                    <p:cond delay="15000"/>
+                                  </p:stCondLst>
+                                  <p:childTnLst>
+                                    <p:animRot by="120000">
+                                      <p:cBhvr>
+                                        <p:cTn id="6" dur="135" fill="hold">
+                                          <p:stCondLst>
+                                            <p:cond delay="0"/>
+                                          </p:stCondLst>
+                                        </p:cTn>
+                                        <p:tgtEl>
+                                          <p:spTgt spid="10"/>
+                                        </p:tgtEl>
+                                        <p:attrNameLst>
+                                          <p:attrName>r</p:attrName>
+                                        </p:attrNameLst>
+                                      </p:cBhvr>
+                                    </p:animRot>
+                                    <p:animRot by="-240000">
+                                      <p:cBhvr>
+                                        <p:cTn id="7" dur="270" fill="hold">
+                                          <p:stCondLst>
+                                            <p:cond delay="270"/>
+                                          </p:stCondLst>
+                                        </p:cTn>
+                                        <p:tgtEl>
+                                          <p:spTgt spid="10"/>
+                                        </p:tgtEl>
+                                        <p:attrNameLst>
+                                          <p:attrName>r</p:attrName>
+                                        </p:attrNameLst>
+                                      </p:cBhvr>
+                                    </p:animRot>
+                                    <p:animRot by="240000">
+                                      <p:cBhvr>
+                                        <p:cTn id="8" dur="270" fill="hold">
+                                          <p:stCondLst>
+                                            <p:cond delay="540"/>
+                                          </p:stCondLst>
+                                        </p:cTn>
+                                        <p:tgtEl>
+                                          <p:spTgt spid="10"/>
+                                        </p:tgtEl>
+                                        <p:attrNameLst>
+                                          <p:attrName>r</p:attrName>
+                                        </p:attrNameLst>
+                                      </p:cBhvr>
+                                    </p:animRot>
+                                    <p:animRot by="-240000">
+                                      <p:cBhvr>
+                                        <p:cTn id="9" dur="270" fill="hold">
+                                          <p:stCondLst>
+                                            <p:cond delay="810"/>
+                                          </p:stCondLst>
+                                        </p:cTn>
+                                        <p:tgtEl>
+                                          <p:spTgt spid="10"/>
+                                        </p:tgtEl>
+                                        <p:attrNameLst>
+                                          <p:attrName>r</p:attrName>
+                                        </p:attrNameLst>
+                                      </p:cBhvr>
+                                    </p:animRot>
+                                    <p:animRot by="120000">
+                                      <p:cBhvr>
+                                        <p:cTn id="10" dur="270" fill="hold">
+                                          <p:stCondLst>
+                                            <p:cond delay="1080"/>
+                                          </p:stCondLst>
+                                        </p:cTn>
+                                        <p:tgtEl>
+                                          <p:spTgt spid="10"/>
+                                        </p:tgtEl>
+                                        <p:attrNameLst>
+                                          <p:attrName>r</p:attrName>
+                                        </p:attrNameLst>
+                                      </p:cBhvr>
+                                    </p:animRot>
+                                  </p:childTnLst>
+                                </p:cTn>
+                              </p:par>
+                              <p:par>
+                                <p:cTn id="11" presetID="32" presetClass="emph" presetSubtype="0" repeatCount="indefinite" fill="hold" grpId="0" nodeType="withEffect">
+                                  <p:stCondLst>
+                                    <p:cond delay="15000"/>
+                                  </p:stCondLst>
+                                  <p:childTnLst>
+                                    <p:animRot by="120000">
+                                      <p:cBhvr>
+                                        <p:cTn id="12" dur="135" fill="hold">
+                                          <p:stCondLst>
+                                            <p:cond delay="0"/>
+                                          </p:stCondLst>
+                                        </p:cTn>
+                                        <p:tgtEl>
+                                          <p:spTgt spid="16"/>
+                                        </p:tgtEl>
+                                        <p:attrNameLst>
+                                          <p:attrName>r</p:attrName>
+                                        </p:attrNameLst>
+                                      </p:cBhvr>
+                                    </p:animRot>
+                                    <p:animRot by="-240000">
+                                      <p:cBhvr>
+                                        <p:cTn id="13" dur="270" fill="hold">
+                                          <p:stCondLst>
+                                            <p:cond delay="270"/>
+                                          </p:stCondLst>
+                                        </p:cTn>
+                                        <p:tgtEl>
+                                          <p:spTgt spid="16"/>
+                                        </p:tgtEl>
+                                        <p:attrNameLst>
+                                          <p:attrName>r</p:attrName>
+                                        </p:attrNameLst>
+                                      </p:cBhvr>
+                                    </p:animRot>
+                                    <p:animRot by="240000">
+                                      <p:cBhvr>
+                                        <p:cTn id="14" dur="270" fill="hold">
+                                          <p:stCondLst>
+                                            <p:cond delay="540"/>
+                                          </p:stCondLst>
+                                        </p:cTn>
+                                        <p:tgtEl>
+                                          <p:spTgt spid="16"/>
+                                        </p:tgtEl>
+                                        <p:attrNameLst>
+                                          <p:attrName>r</p:attrName>
+                                        </p:attrNameLst>
+                                      </p:cBhvr>
+                                    </p:animRot>
+                                    <p:animRot by="-240000">
+                                      <p:cBhvr>
+                                        <p:cTn id="15" dur="270" fill="hold">
+                                          <p:stCondLst>
+                                            <p:cond delay="810"/>
+                                          </p:stCondLst>
+                                        </p:cTn>
+                                        <p:tgtEl>
+                                          <p:spTgt spid="16"/>
+                                        </p:tgtEl>
+                                        <p:attrNameLst>
+                                          <p:attrName>r</p:attrName>
+                                        </p:attrNameLst>
+                                      </p:cBhvr>
+                                    </p:animRot>
+                                    <p:animRot by="120000">
+                                      <p:cBhvr>
+                                        <p:cTn id="16" dur="270" fill="hold">
+                                          <p:stCondLst>
+                                            <p:cond delay="1080"/>
+                                          </p:stCondLst>
+                                        </p:cTn>
+                                        <p:tgtEl>
+                                          <p:spTgt spid="16"/>
+                                        </p:tgtEl>
+                                        <p:attrNameLst>
+                                          <p:attrName>r</p:attrName>
+                                        </p:attrNameLst>
+                                      </p:cBhvr>
+                                    </p:animRot>
+                                  </p:childTnLst>
+                                </p:cTn>
+                              </p:par>
+                            </p:childTnLst>
+                          </p:cTn>
+                        </p:par>
+                      </p:childTnLst>
+                    </p:cTn>
+                  </p:par>
+                </p:childTnLst>
+              </p:cTn>
+              <p:prevCondLst>
+                <p:cond evt="onPrev" delay="0">
+                  <p:tgtEl>
+                    <p:sldTgt/>
+                  </p:tgtEl>
+                </p:cond>
+              </p:prevCondLst>
+              <p:nextCondLst>
+                <p:cond evt="onNext" delay="0">
+                  <p:tgtEl>
+                    <p:sldTgt/>
+                  </p:tgtEl>
+                </p:cond>
+              </p:nextCondLst>
+            </p:seq>
+          </p:childTnLst>
+        </p:cTn>
+      </p:par>
+    </p:tnLst>
+    <p:bldLst>
+      <p:bldP spid="10" grpId="0" animBg="1"/>
+      <p:bldP spid="16" grpId="0" animBg="1"/>
+    </p:bldLst>
+  </p:timing>
 </p:sld>
 </file>
 
@@ -6129,6 +6328,7 @@
       <p:sp>
         <p:nvSpPr>
           <p:cNvPr id="7" name="Nyíl: balra mutató 6">
+            <a:hlinkClick r:id="rId4" action="ppaction://hlinksldjump"/>
             <a:extLst>
               <a:ext uri="{FF2B5EF4-FFF2-40B4-BE49-F238E27FC236}">
                 <a16:creationId xmlns:a16="http://schemas.microsoft.com/office/drawing/2014/main" id="{6F907B81-CF24-7D98-B2E4-ED5A6671EDAC}"/>
@@ -6167,7 +6367,7 @@
           <a:p>
             <a:pPr algn="ctr"/>
             <a:r>
-              <a:rPr lang="hu-HU" u="sng">
+              <a:rPr lang="hu-HU" u="sng" dirty="0">
                 <a:solidFill>
                   <a:schemeClr val="bg1"/>
                 </a:solidFill>
@@ -6181,7 +6381,7 @@
               </a:rPr>
               <a:t>Vissza 2. diára</a:t>
             </a:r>
-            <a:endParaRPr lang="hu-HU" u="sng">
+            <a:endParaRPr lang="hu-HU" u="sng" dirty="0">
               <a:solidFill>
                 <a:schemeClr val="bg1"/>
               </a:solidFill>
@@ -6211,6 +6411,144 @@
       </p:transition>
     </mc:Fallback>
   </mc:AlternateContent>
+  <p:timing>
+    <p:tnLst>
+      <p:par>
+        <p:cTn id="1" dur="indefinite" restart="never" nodeType="tmRoot">
+          <p:childTnLst>
+            <p:seq concurrent="1" nextAc="seek">
+              <p:cTn id="2" dur="indefinite" nodeType="mainSeq">
+                <p:childTnLst>
+                  <p:par>
+                    <p:cTn id="3" fill="hold">
+                      <p:stCondLst>
+                        <p:cond delay="indefinite"/>
+                        <p:cond evt="onBegin" delay="0">
+                          <p:tn val="2"/>
+                        </p:cond>
+                      </p:stCondLst>
+                      <p:childTnLst>
+                        <p:par>
+                          <p:cTn id="4" fill="hold">
+                            <p:stCondLst>
+                              <p:cond delay="0"/>
+                            </p:stCondLst>
+                            <p:childTnLst>
+                              <p:par>
+                                <p:cTn id="5" presetID="32" presetClass="emph" presetSubtype="0" fill="hold" grpId="0" nodeType="withEffect">
+                                  <p:stCondLst>
+                                    <p:cond delay="12000"/>
+                                  </p:stCondLst>
+                                  <p:childTnLst>
+                                    <p:animRot by="120000">
+                                      <p:cBhvr>
+                                        <p:cTn id="6" dur="100" fill="hold">
+                                          <p:stCondLst>
+                                            <p:cond delay="0"/>
+                                          </p:stCondLst>
+                                        </p:cTn>
+                                        <p:tgtEl>
+                                          <p:spTgt spid="7"/>
+                                        </p:tgtEl>
+                                        <p:attrNameLst>
+                                          <p:attrName>r</p:attrName>
+                                        </p:attrNameLst>
+                                      </p:cBhvr>
+                                    </p:animRot>
+                                    <p:animRot by="-240000">
+                                      <p:cBhvr>
+                                        <p:cTn id="7" dur="200" fill="hold">
+                                          <p:stCondLst>
+                                            <p:cond delay="200"/>
+                                          </p:stCondLst>
+                                        </p:cTn>
+                                        <p:tgtEl>
+                                          <p:spTgt spid="7"/>
+                                        </p:tgtEl>
+                                        <p:attrNameLst>
+                                          <p:attrName>r</p:attrName>
+                                        </p:attrNameLst>
+                                      </p:cBhvr>
+                                    </p:animRot>
+                                    <p:animRot by="240000">
+                                      <p:cBhvr>
+                                        <p:cTn id="8" dur="200" fill="hold">
+                                          <p:stCondLst>
+                                            <p:cond delay="400"/>
+                                          </p:stCondLst>
+                                        </p:cTn>
+                                        <p:tgtEl>
+                                          <p:spTgt spid="7"/>
+                                        </p:tgtEl>
+                                        <p:attrNameLst>
+                                          <p:attrName>r</p:attrName>
+                                        </p:attrNameLst>
+                                      </p:cBhvr>
+                                    </p:animRot>
+                                    <p:animRot by="-240000">
+                                      <p:cBhvr>
+                                        <p:cTn id="9" dur="200" fill="hold">
+                                          <p:stCondLst>
+                                            <p:cond delay="600"/>
+                                          </p:stCondLst>
+                                        </p:cTn>
+                                        <p:tgtEl>
+                                          <p:spTgt spid="7"/>
+                                        </p:tgtEl>
+                                        <p:attrNameLst>
+                                          <p:attrName>r</p:attrName>
+                                        </p:attrNameLst>
+                                      </p:cBhvr>
+                                    </p:animRot>
+                                    <p:animRot by="120000">
+                                      <p:cBhvr>
+                                        <p:cTn id="10" dur="200" fill="hold">
+                                          <p:stCondLst>
+                                            <p:cond delay="800"/>
+                                          </p:stCondLst>
+                                        </p:cTn>
+                                        <p:tgtEl>
+                                          <p:spTgt spid="7"/>
+                                        </p:tgtEl>
+                                        <p:attrNameLst>
+                                          <p:attrName>r</p:attrName>
+                                        </p:attrNameLst>
+                                      </p:cBhvr>
+                                    </p:animRot>
+                                  </p:childTnLst>
+                                </p:cTn>
+                              </p:par>
+                            </p:childTnLst>
+                          </p:cTn>
+                        </p:par>
+                      </p:childTnLst>
+                    </p:cTn>
+                  </p:par>
+                </p:childTnLst>
+              </p:cTn>
+              <p:prevCondLst>
+                <p:cond evt="onPrev" delay="0">
+                  <p:tgtEl>
+                    <p:sldTgt/>
+                  </p:tgtEl>
+                </p:cond>
+              </p:prevCondLst>
+              <p:nextCondLst>
+                <p:cond evt="onNext" delay="0">
+                  <p:tgtEl>
+                    <p:sldTgt/>
+                  </p:tgtEl>
+                </p:cond>
+              </p:nextCondLst>
+            </p:seq>
+          </p:childTnLst>
+        </p:cTn>
+      </p:par>
+    </p:tnLst>
+    <p:bldLst>
+      <p:bldP spid="7" grpId="0" animBg="1"/>
+    </p:bldLst>
+  </p:timing>
 </p:sld>
 </file>
 
@@ -6600,6 +6938,7 @@
       <p:sp>
         <p:nvSpPr>
           <p:cNvPr id="21" name="Nyíl: balra mutató 20">
+            <a:hlinkClick r:id="rId3" action="ppaction://hlinksldjump"/>
             <a:extLst>
               <a:ext uri="{FF2B5EF4-FFF2-40B4-BE49-F238E27FC236}">
                 <a16:creationId xmlns:a16="http://schemas.microsoft.com/office/drawing/2014/main" id="{EA609FC5-0E66-4C0F-8D9D-F37CADC88421}"/>
@@ -6611,7 +6950,7 @@
         </p:nvSpPr>
         <p:spPr>
           <a:xfrm>
-            <a:off x="9164320" y="5831839"/>
+            <a:off x="9215358" y="6170805"/>
             <a:ext cx="2715768" cy="576072"/>
           </a:xfrm>
           <a:prstGeom prst="leftArrow">
@@ -6690,6 +7029,54 @@
           </a:prstGeom>
         </p:spPr>
       </p:pic>
+      <p:sp>
+        <p:nvSpPr>
+          <p:cNvPr id="5" name="Nyíl: jobbra mutató 4">
+            <a:hlinkClick r:id="rId5" action="ppaction://hlinksldjump"/>
+            <a:extLst>
+              <a:ext uri="{FF2B5EF4-FFF2-40B4-BE49-F238E27FC236}">
+                <a16:creationId xmlns:a16="http://schemas.microsoft.com/office/drawing/2014/main" id="{672E2567-5FEF-4186-8263-B7F17CF79FB8}"/>
+              </a:ext>
+            </a:extLst>
+          </p:cNvPr>
+          <p:cNvSpPr/>
+          <p:nvPr/>
+        </p:nvSpPr>
+        <p:spPr>
+          <a:xfrm>
+            <a:off x="9476230" y="5677655"/>
+            <a:ext cx="2454896" cy="493150"/>
+          </a:xfrm>
+          <a:prstGeom prst="rightArrow">
+            <a:avLst/>
+          </a:prstGeom>
+        </p:spPr>
+        <p:style>
+          <a:lnRef idx="0">
+            <a:schemeClr val="accent1"/>
+          </a:lnRef>
+          <a:fillRef idx="3">
+            <a:schemeClr val="accent1"/>
+          </a:fillRef>
+          <a:effectRef idx="3">
+            <a:schemeClr val="accent1"/>
+          </a:effectRef>
+          <a:fontRef idx="minor">
+            <a:schemeClr val="lt1"/>
+          </a:fontRef>
+        </p:style>
+        <p:txBody>
+          <a:bodyPr rtlCol="0" anchor="ctr"/>
+          <a:lstStyle/>
+          <a:p>
+            <a:pPr algn="ctr"/>
+            <a:r>
+              <a:rPr lang="hu-HU" dirty="0"/>
+              <a:t>Folytatás</a:t>
+            </a:r>
+          </a:p>
+        </p:txBody>
+      </p:sp>
     </p:spTree>
     <p:extLst>
       <p:ext uri="{BB962C8B-B14F-4D97-AF65-F5344CB8AC3E}">
@@ -6712,6 +7099,229 @@
       </p:transition>
     </mc:Fallback>
   </mc:AlternateContent>
+  <p:timing>
+    <p:tnLst>
+      <p:par>
+        <p:cTn id="1" dur="indefinite" restart="never" nodeType="tmRoot">
+          <p:childTnLst>
+            <p:seq concurrent="1" nextAc="seek">
+              <p:cTn id="2" dur="indefinite" nodeType="mainSeq">
+                <p:childTnLst>
+                  <p:par>
+                    <p:cTn id="3" fill="hold">
+                      <p:stCondLst>
+                        <p:cond delay="indefinite"/>
+                        <p:cond evt="onBegin" delay="0">
+                          <p:tn val="2"/>
+                        </p:cond>
+                      </p:stCondLst>
+                      <p:childTnLst>
+                        <p:par>
+                          <p:cTn id="4" fill="hold">
+                            <p:stCondLst>
+                              <p:cond delay="0"/>
+                            </p:stCondLst>
+                            <p:childTnLst>
+                              <p:par>
+                                <p:cTn id="5" presetID="32" presetClass="emph" presetSubtype="0" fill="hold" grpId="0" nodeType="withEffect">
+                                  <p:stCondLst>
+                                    <p:cond delay="10000"/>
+                                  </p:stCondLst>
+                                  <p:childTnLst>
+                                    <p:animRot by="120000">
+                                      <p:cBhvr>
+                                        <p:cTn id="6" dur="100" fill="hold">
+                                          <p:stCondLst>
+                                            <p:cond delay="0"/>
+                                          </p:stCondLst>
+                                        </p:cTn>
+                                        <p:tgtEl>
+                                          <p:spTgt spid="21"/>
+                                        </p:tgtEl>
+                                        <p:attrNameLst>
+                                          <p:attrName>r</p:attrName>
+                                        </p:attrNameLst>
+                                      </p:cBhvr>
+                                    </p:animRot>
+                                    <p:animRot by="-240000">
+                                      <p:cBhvr>
+                                        <p:cTn id="7" dur="200" fill="hold">
+                                          <p:stCondLst>
+                                            <p:cond delay="200"/>
+                                          </p:stCondLst>
+                                        </p:cTn>
+                                        <p:tgtEl>
+                                          <p:spTgt spid="21"/>
+                                        </p:tgtEl>
+                                        <p:attrNameLst>
+                                          <p:attrName>r</p:attrName>
+                                        </p:attrNameLst>
+                                      </p:cBhvr>
+                                    </p:animRot>
+                                    <p:animRot by="240000">
+                                      <p:cBhvr>
+                                        <p:cTn id="8" dur="200" fill="hold">
+                                          <p:stCondLst>
+                                            <p:cond delay="400"/>
+                                          </p:stCondLst>
+                                        </p:cTn>
+                                        <p:tgtEl>
+                                          <p:spTgt spid="21"/>
+                                        </p:tgtEl>
+                                        <p:attrNameLst>
+                                          <p:attrName>r</p:attrName>
+                                        </p:attrNameLst>
+                                      </p:cBhvr>
+                                    </p:animRot>
+                                    <p:animRot by="-240000">
+                                      <p:cBhvr>
+                                        <p:cTn id="9" dur="200" fill="hold">
+                                          <p:stCondLst>
+                                            <p:cond delay="600"/>
+                                          </p:stCondLst>
+                                        </p:cTn>
+                                        <p:tgtEl>
+                                          <p:spTgt spid="21"/>
+                                        </p:tgtEl>
+                                        <p:attrNameLst>
+                                          <p:attrName>r</p:attrName>
+                                        </p:attrNameLst>
+                                      </p:cBhvr>
+                                    </p:animRot>
+                                    <p:animRot by="120000">
+                                      <p:cBhvr>
+                                        <p:cTn id="10" dur="200" fill="hold">
+                                          <p:stCondLst>
+                                            <p:cond delay="800"/>
+                                          </p:stCondLst>
+                                        </p:cTn>
+                                        <p:tgtEl>
+                                          <p:spTgt spid="21"/>
+                                        </p:tgtEl>
+                                        <p:attrNameLst>
+                                          <p:attrName>r</p:attrName>
+                                        </p:attrNameLst>
+                                      </p:cBhvr>
+                                    </p:animRot>
+                                  </p:childTnLst>
+                                </p:cTn>
+                              </p:par>
+                              <p:par>
+                                <p:cTn id="11" presetID="32" presetClass="emph" presetSubtype="0" fill="hold" grpId="0" nodeType="withEffect">
+                                  <p:stCondLst>
+                                    <p:cond delay="10000"/>
+                                  </p:stCondLst>
+                                  <p:childTnLst>
+                                    <p:animRot by="120000">
+                                      <p:cBhvr>
+                                        <p:cTn id="12" dur="100" fill="hold">
+                                          <p:stCondLst>
+                                            <p:cond delay="0"/>
+                                          </p:stCondLst>
+                                        </p:cTn>
+                                        <p:tgtEl>
+                                          <p:spTgt spid="5"/>
+                                        </p:tgtEl>
+                                        <p:attrNameLst>
+                                          <p:attrName>r</p:attrName>
+                                        </p:attrNameLst>
+                                      </p:cBhvr>
+                                    </p:animRot>
+                                    <p:animRot by="-240000">
+                                      <p:cBhvr>
+                                        <p:cTn id="13" dur="200" fill="hold">
+                                          <p:stCondLst>
+                                            <p:cond delay="200"/>
+                                          </p:stCondLst>
+                                        </p:cTn>
+                                        <p:tgtEl>
+                                          <p:spTgt spid="5"/>
+                                        </p:tgtEl>
+                                        <p:attrNameLst>
+                                          <p:attrName>r</p:attrName>
+                                        </p:attrNameLst>
+                                      </p:cBhvr>
+                                    </p:animRot>
+                                    <p:animRot by="240000">
+                                      <p:cBhvr>
+                                        <p:cTn id="14" dur="200" fill="hold">
+                                          <p:stCondLst>
+                                            <p:cond delay="400"/>
+                                          </p:stCondLst>
+                                        </p:cTn>
+                                        <p:tgtEl>
+                                          <p:spTgt spid="5"/>
+                                        </p:tgtEl>
+                                        <p:attrNameLst>
+                                          <p:attrName>r</p:attrName>
+                                        </p:attrNameLst>
+                                      </p:cBhvr>
+                                    </p:animRot>
+                                    <p:animRot by="-240000">
+                                      <p:cBhvr>
+                                        <p:cTn id="15" dur="200" fill="hold">
+                                          <p:stCondLst>
+                                            <p:cond delay="600"/>
+                                          </p:stCondLst>
+                                        </p:cTn>
+                                        <p:tgtEl>
+                                          <p:spTgt spid="5"/>
+                                        </p:tgtEl>
+                                        <p:attrNameLst>
+                                          <p:attrName>r</p:attrName>
+                                        </p:attrNameLst>
+                                      </p:cBhvr>
+                                    </p:animRot>
+                                    <p:animRot by="120000">
+                                      <p:cBhvr>
+                                        <p:cTn id="16" dur="200" fill="hold">
+                                          <p:stCondLst>
+                                            <p:cond delay="800"/>
+                                          </p:stCondLst>
+                                        </p:cTn>
+                                        <p:tgtEl>
+                                          <p:spTgt spid="5"/>
+                                        </p:tgtEl>
+                                        <p:attrNameLst>
+                                          <p:attrName>r</p:attrName>
+                                        </p:attrNameLst>
+                                      </p:cBhvr>
+                                    </p:animRot>
+                                  </p:childTnLst>
+                                </p:cTn>
+                              </p:par>
+                            </p:childTnLst>
+                          </p:cTn>
+                        </p:par>
+                      </p:childTnLst>
+                    </p:cTn>
+                  </p:par>
+                </p:childTnLst>
+              </p:cTn>
+              <p:prevCondLst>
+                <p:cond evt="onPrev" delay="0">
+                  <p:tgtEl>
+                    <p:sldTgt/>
+                  </p:tgtEl>
+                </p:cond>
+              </p:prevCondLst>
+              <p:nextCondLst>
+                <p:cond evt="onNext" delay="0">
+                  <p:tgtEl>
+                    <p:sldTgt/>
+                  </p:tgtEl>
+                </p:cond>
+              </p:nextCondLst>
+            </p:seq>
+          </p:childTnLst>
+        </p:cTn>
+      </p:par>
+    </p:tnLst>
+    <p:bldLst>
+      <p:bldP spid="21" grpId="0" animBg="1"/>
+      <p:bldP spid="5" grpId="0" animBg="1"/>
+    </p:bldLst>
+  </p:timing>
 </p:sld>
 </file>
 
@@ -6878,6 +7488,7 @@
       <p:sp>
         <p:nvSpPr>
           <p:cNvPr id="12" name="Nyíl: balra mutató 11">
+            <a:hlinkClick r:id="rId2" action="ppaction://hlinksldjump"/>
             <a:extLst>
               <a:ext uri="{FF2B5EF4-FFF2-40B4-BE49-F238E27FC236}">
                 <a16:creationId xmlns:a16="http://schemas.microsoft.com/office/drawing/2014/main" id="{AA251F73-6F6F-5B4E-DBDF-DEB90628683B}"/>
@@ -6930,7 +7541,7 @@
               </a:rPr>
               <a:t>Vissza 2. diára</a:t>
             </a:r>
-            <a:endParaRPr lang="hu-HU" u="sng">
+            <a:endParaRPr lang="hu-HU" u="sng" dirty="0">
               <a:solidFill>
                 <a:schemeClr val="bg1"/>
               </a:solidFill>
@@ -7069,6 +7680,144 @@
       </p:transition>
     </mc:Fallback>
   </mc:AlternateContent>
+  <p:timing>
+    <p:tnLst>
+      <p:par>
+        <p:cTn id="1" dur="indefinite" restart="never" nodeType="tmRoot">
+          <p:childTnLst>
+            <p:seq concurrent="1" nextAc="seek">
+              <p:cTn id="2" dur="indefinite" nodeType="mainSeq">
+                <p:childTnLst>
+                  <p:par>
+                    <p:cTn id="3" fill="hold">
+                      <p:stCondLst>
+                        <p:cond delay="indefinite"/>
+                        <p:cond evt="onBegin" delay="0">
+                          <p:tn val="2"/>
+                        </p:cond>
+                      </p:stCondLst>
+                      <p:childTnLst>
+                        <p:par>
+                          <p:cTn id="4" fill="hold">
+                            <p:stCondLst>
+                              <p:cond delay="0"/>
+                            </p:stCondLst>
+                            <p:childTnLst>
+                              <p:par>
+                                <p:cTn id="5" presetID="32" presetClass="emph" presetSubtype="0" fill="hold" grpId="0" nodeType="withEffect">
+                                  <p:stCondLst>
+                                    <p:cond delay="10000"/>
+                                  </p:stCondLst>
+                                  <p:childTnLst>
+                                    <p:animRot by="120000">
+                                      <p:cBhvr>
+                                        <p:cTn id="6" dur="100" fill="hold">
+                                          <p:stCondLst>
+                                            <p:cond delay="0"/>
+                                          </p:stCondLst>
+                                        </p:cTn>
+                                        <p:tgtEl>
+                                          <p:spTgt spid="12"/>
+                                        </p:tgtEl>
+                                        <p:attrNameLst>
+                                          <p:attrName>r</p:attrName>
+                                        </p:attrNameLst>
+                                      </p:cBhvr>
+                                    </p:animRot>
+                                    <p:animRot by="-240000">
+                                      <p:cBhvr>
+                                        <p:cTn id="7" dur="200" fill="hold">
+                                          <p:stCondLst>
+                                            <p:cond delay="200"/>
+                                          </p:stCondLst>
+                                        </p:cTn>
+                                        <p:tgtEl>
+                                          <p:spTgt spid="12"/>
+                                        </p:tgtEl>
+                                        <p:attrNameLst>
+                                          <p:attrName>r</p:attrName>
+                                        </p:attrNameLst>
+                                      </p:cBhvr>
+                                    </p:animRot>
+                                    <p:animRot by="240000">
+                                      <p:cBhvr>
+                                        <p:cTn id="8" dur="200" fill="hold">
+                                          <p:stCondLst>
+                                            <p:cond delay="400"/>
+                                          </p:stCondLst>
+                                        </p:cTn>
+                                        <p:tgtEl>
+                                          <p:spTgt spid="12"/>
+                                        </p:tgtEl>
+                                        <p:attrNameLst>
+                                          <p:attrName>r</p:attrName>
+                                        </p:attrNameLst>
+                                      </p:cBhvr>
+                                    </p:animRot>
+                                    <p:animRot by="-240000">
+                                      <p:cBhvr>
+                                        <p:cTn id="9" dur="200" fill="hold">
+                                          <p:stCondLst>
+                                            <p:cond delay="600"/>
+                                          </p:stCondLst>
+                                        </p:cTn>
+                                        <p:tgtEl>
+                                          <p:spTgt spid="12"/>
+                                        </p:tgtEl>
+                                        <p:attrNameLst>
+                                          <p:attrName>r</p:attrName>
+                                        </p:attrNameLst>
+                                      </p:cBhvr>
+                                    </p:animRot>
+                                    <p:animRot by="120000">
+                                      <p:cBhvr>
+                                        <p:cTn id="10" dur="200" fill="hold">
+                                          <p:stCondLst>
+                                            <p:cond delay="800"/>
+                                          </p:stCondLst>
+                                        </p:cTn>
+                                        <p:tgtEl>
+                                          <p:spTgt spid="12"/>
+                                        </p:tgtEl>
+                                        <p:attrNameLst>
+                                          <p:attrName>r</p:attrName>
+                                        </p:attrNameLst>
+                                      </p:cBhvr>
+                                    </p:animRot>
+                                  </p:childTnLst>
+                                </p:cTn>
+                              </p:par>
+                            </p:childTnLst>
+                          </p:cTn>
+                        </p:par>
+                      </p:childTnLst>
+                    </p:cTn>
+                  </p:par>
+                </p:childTnLst>
+              </p:cTn>
+              <p:prevCondLst>
+                <p:cond evt="onPrev" delay="0">
+                  <p:tgtEl>
+                    <p:sldTgt/>
+                  </p:tgtEl>
+                </p:cond>
+              </p:prevCondLst>
+              <p:nextCondLst>
+                <p:cond evt="onNext" delay="0">
+                  <p:tgtEl>
+                    <p:sldTgt/>
+                  </p:tgtEl>
+                </p:cond>
+              </p:nextCondLst>
+            </p:seq>
+          </p:childTnLst>
+        </p:cTn>
+      </p:par>
+    </p:tnLst>
+    <p:bldLst>
+      <p:bldP spid="12" grpId="0" animBg="1"/>
+    </p:bldLst>
+  </p:timing>
 </p:sld>
 </file>
 
@@ -7175,6 +7924,7 @@
       <p:sp>
         <p:nvSpPr>
           <p:cNvPr id="5" name="Nyíl: balra mutató 20">
+            <a:hlinkClick r:id="rId2" action="ppaction://hlinksldjump"/>
             <a:extLst>
               <a:ext uri="{FF2B5EF4-FFF2-40B4-BE49-F238E27FC236}">
                 <a16:creationId xmlns:a16="http://schemas.microsoft.com/office/drawing/2014/main" id="{CD7720AF-686C-8EB3-4607-7E9381DDF093}"/>
@@ -7213,7 +7963,7 @@
           <a:p>
             <a:pPr algn="ctr"/>
             <a:r>
-              <a:rPr lang="hu-HU" u="sng">
+              <a:rPr lang="hu-HU" u="sng" dirty="0">
                 <a:solidFill>
                   <a:schemeClr val="bg1"/>
                 </a:solidFill>
@@ -7227,7 +7977,7 @@
               </a:rPr>
               <a:t>Vissza 2. diára</a:t>
             </a:r>
-            <a:endParaRPr lang="hu-HU" u="sng">
+            <a:endParaRPr lang="hu-HU" u="sng" dirty="0">
               <a:solidFill>
                 <a:schemeClr val="bg1"/>
               </a:solidFill>
@@ -7257,6 +8007,144 @@
       </p:transition>
     </mc:Fallback>
   </mc:AlternateContent>
+  <p:timing>
+    <p:tnLst>
+      <p:par>
+        <p:cTn id="1" dur="indefinite" restart="never" nodeType="tmRoot">
+          <p:childTnLst>
+            <p:seq concurrent="1" nextAc="seek">
+              <p:cTn id="2" dur="indefinite" nodeType="mainSeq">
+                <p:childTnLst>
+                  <p:par>
+                    <p:cTn id="3" fill="hold">
+                      <p:stCondLst>
+                        <p:cond delay="indefinite"/>
+                        <p:cond evt="onBegin" delay="0">
+                          <p:tn val="2"/>
+                        </p:cond>
+                      </p:stCondLst>
+                      <p:childTnLst>
+                        <p:par>
+                          <p:cTn id="4" fill="hold">
+                            <p:stCondLst>
+                              <p:cond delay="0"/>
+                            </p:stCondLst>
+                            <p:childTnLst>
+                              <p:par>
+                                <p:cTn id="5" presetID="32" presetClass="emph" presetSubtype="0" fill="hold" grpId="0" nodeType="withEffect">
+                                  <p:stCondLst>
+                                    <p:cond delay="3000"/>
+                                  </p:stCondLst>
+                                  <p:childTnLst>
+                                    <p:animRot by="120000">
+                                      <p:cBhvr>
+                                        <p:cTn id="6" dur="100" fill="hold">
+                                          <p:stCondLst>
+                                            <p:cond delay="0"/>
+                                          </p:stCondLst>
+                                        </p:cTn>
+                                        <p:tgtEl>
+                                          <p:spTgt spid="5"/>
+                                        </p:tgtEl>
+                                        <p:attrNameLst>
+                                          <p:attrName>r</p:attrName>
+                                        </p:attrNameLst>
+                                      </p:cBhvr>
+                                    </p:animRot>
+                                    <p:animRot by="-240000">
+                                      <p:cBhvr>
+                                        <p:cTn id="7" dur="200" fill="hold">
+                                          <p:stCondLst>
+                                            <p:cond delay="200"/>
+                                          </p:stCondLst>
+                                        </p:cTn>
+                                        <p:tgtEl>
+                                          <p:spTgt spid="5"/>
+                                        </p:tgtEl>
+                                        <p:attrNameLst>
+                                          <p:attrName>r</p:attrName>
+                                        </p:attrNameLst>
+                                      </p:cBhvr>
+                                    </p:animRot>
+                                    <p:animRot by="240000">
+                                      <p:cBhvr>
+                                        <p:cTn id="8" dur="200" fill="hold">
+                                          <p:stCondLst>
+                                            <p:cond delay="400"/>
+                                          </p:stCondLst>
+                                        </p:cTn>
+                                        <p:tgtEl>
+                                          <p:spTgt spid="5"/>
+                                        </p:tgtEl>
+                                        <p:attrNameLst>
+                                          <p:attrName>r</p:attrName>
+                                        </p:attrNameLst>
+                                      </p:cBhvr>
+                                    </p:animRot>
+                                    <p:animRot by="-240000">
+                                      <p:cBhvr>
+                                        <p:cTn id="9" dur="200" fill="hold">
+                                          <p:stCondLst>
+                                            <p:cond delay="600"/>
+                                          </p:stCondLst>
+                                        </p:cTn>
+                                        <p:tgtEl>
+                                          <p:spTgt spid="5"/>
+                                        </p:tgtEl>
+                                        <p:attrNameLst>
+                                          <p:attrName>r</p:attrName>
+                                        </p:attrNameLst>
+                                      </p:cBhvr>
+                                    </p:animRot>
+                                    <p:animRot by="120000">
+                                      <p:cBhvr>
+                                        <p:cTn id="10" dur="200" fill="hold">
+                                          <p:stCondLst>
+                                            <p:cond delay="800"/>
+                                          </p:stCondLst>
+                                        </p:cTn>
+                                        <p:tgtEl>
+                                          <p:spTgt spid="5"/>
+                                        </p:tgtEl>
+                                        <p:attrNameLst>
+                                          <p:attrName>r</p:attrName>
+                                        </p:attrNameLst>
+                                      </p:cBhvr>
+                                    </p:animRot>
+                                  </p:childTnLst>
+                                </p:cTn>
+                              </p:par>
+                            </p:childTnLst>
+                          </p:cTn>
+                        </p:par>
+                      </p:childTnLst>
+                    </p:cTn>
+                  </p:par>
+                </p:childTnLst>
+              </p:cTn>
+              <p:prevCondLst>
+                <p:cond evt="onPrev" delay="0">
+                  <p:tgtEl>
+                    <p:sldTgt/>
+                  </p:tgtEl>
+                </p:cond>
+              </p:prevCondLst>
+              <p:nextCondLst>
+                <p:cond evt="onNext" delay="0">
+                  <p:tgtEl>
+                    <p:sldTgt/>
+                  </p:tgtEl>
+                </p:cond>
+              </p:nextCondLst>
+            </p:seq>
+          </p:childTnLst>
+        </p:cTn>
+      </p:par>
+    </p:tnLst>
+    <p:bldLst>
+      <p:bldP spid="5" grpId="0" animBg="1"/>
+    </p:bldLst>
+  </p:timing>
 </p:sld>
 </file>
 

--- a/nepesseg2025.pptx
+++ b/nepesseg2025.pptx
@@ -1971,18 +1971,9 @@
   <p:clrMapOvr>
     <a:masterClrMapping/>
   </p:clrMapOvr>
-  <mc:AlternateContent xmlns:mc="http://schemas.openxmlformats.org/markup-compatibility/2006" xmlns:p14="http://schemas.microsoft.com/office/powerpoint/2010/main">
-    <mc:Choice Requires="p14">
-      <p:transition spd="med" p14:dur="700">
-        <p:fade/>
-      </p:transition>
-    </mc:Choice>
-    <mc:Fallback xmlns="">
-      <p:transition spd="med">
-        <p:fade/>
-      </p:transition>
-    </mc:Fallback>
-  </mc:AlternateContent>
+  <p:transition spd="slow">
+    <p:comb/>
+  </p:transition>
 </p:sldLayout>
 </file>
 
@@ -2162,18 +2153,9 @@
   <p:clrMapOvr>
     <a:masterClrMapping/>
   </p:clrMapOvr>
-  <mc:AlternateContent xmlns:mc="http://schemas.openxmlformats.org/markup-compatibility/2006" xmlns:p14="http://schemas.microsoft.com/office/powerpoint/2010/main">
-    <mc:Choice Requires="p14">
-      <p:transition spd="med" p14:dur="700">
-        <p:fade/>
-      </p:transition>
-    </mc:Choice>
-    <mc:Fallback xmlns="">
-      <p:transition spd="med">
-        <p:fade/>
-      </p:transition>
-    </mc:Fallback>
-  </mc:AlternateContent>
+  <p:transition spd="slow">
+    <p:comb/>
+  </p:transition>
 </p:sldLayout>
 </file>
 
@@ -2363,18 +2345,9 @@
   <p:clrMapOvr>
     <a:masterClrMapping/>
   </p:clrMapOvr>
-  <mc:AlternateContent xmlns:mc="http://schemas.openxmlformats.org/markup-compatibility/2006" xmlns:p14="http://schemas.microsoft.com/office/powerpoint/2010/main">
-    <mc:Choice Requires="p14">
-      <p:transition spd="med" p14:dur="700">
-        <p:fade/>
-      </p:transition>
-    </mc:Choice>
-    <mc:Fallback xmlns="">
-      <p:transition spd="med">
-        <p:fade/>
-      </p:transition>
-    </mc:Fallback>
-  </mc:AlternateContent>
+  <p:transition spd="slow">
+    <p:comb/>
+  </p:transition>
 </p:sldLayout>
 </file>
 
@@ -2574,18 +2547,9 @@
   <p:clrMapOvr>
     <a:masterClrMapping/>
   </p:clrMapOvr>
-  <mc:AlternateContent xmlns:mc="http://schemas.openxmlformats.org/markup-compatibility/2006" xmlns:p14="http://schemas.microsoft.com/office/powerpoint/2010/main">
-    <mc:Choice Requires="p14">
-      <p:transition spd="med" p14:dur="700">
-        <p:fade/>
-      </p:transition>
-    </mc:Choice>
-    <mc:Fallback xmlns="">
-      <p:transition spd="med">
-        <p:fade/>
-      </p:transition>
-    </mc:Fallback>
-  </mc:AlternateContent>
+  <p:transition spd="slow">
+    <p:comb/>
+  </p:transition>
 </p:sldLayout>
 </file>
 
@@ -2906,18 +2870,9 @@
   <p:clrMapOvr>
     <a:masterClrMapping/>
   </p:clrMapOvr>
-  <mc:AlternateContent xmlns:mc="http://schemas.openxmlformats.org/markup-compatibility/2006" xmlns:p14="http://schemas.microsoft.com/office/powerpoint/2010/main">
-    <mc:Choice Requires="p14">
-      <p:transition spd="med" p14:dur="700">
-        <p:fade/>
-      </p:transition>
-    </mc:Choice>
-    <mc:Fallback xmlns="">
-      <p:transition spd="med">
-        <p:fade/>
-      </p:transition>
-    </mc:Fallback>
-  </mc:AlternateContent>
+  <p:transition spd="slow">
+    <p:comb/>
+  </p:transition>
 </p:sldLayout>
 </file>
 
@@ -3183,18 +3138,9 @@
   <p:clrMapOvr>
     <a:masterClrMapping/>
   </p:clrMapOvr>
-  <mc:AlternateContent xmlns:mc="http://schemas.openxmlformats.org/markup-compatibility/2006" xmlns:p14="http://schemas.microsoft.com/office/powerpoint/2010/main">
-    <mc:Choice Requires="p14">
-      <p:transition spd="med" p14:dur="700">
-        <p:fade/>
-      </p:transition>
-    </mc:Choice>
-    <mc:Fallback xmlns="">
-      <p:transition spd="med">
-        <p:fade/>
-      </p:transition>
-    </mc:Fallback>
-  </mc:AlternateContent>
+  <p:transition spd="slow">
+    <p:comb/>
+  </p:transition>
 </p:sldLayout>
 </file>
 
@@ -3597,18 +3543,9 @@
   <p:clrMapOvr>
     <a:masterClrMapping/>
   </p:clrMapOvr>
-  <mc:AlternateContent xmlns:mc="http://schemas.openxmlformats.org/markup-compatibility/2006" xmlns:p14="http://schemas.microsoft.com/office/powerpoint/2010/main">
-    <mc:Choice Requires="p14">
-      <p:transition spd="med" p14:dur="700">
-        <p:fade/>
-      </p:transition>
-    </mc:Choice>
-    <mc:Fallback xmlns="">
-      <p:transition spd="med">
-        <p:fade/>
-      </p:transition>
-    </mc:Fallback>
-  </mc:AlternateContent>
+  <p:transition spd="slow">
+    <p:comb/>
+  </p:transition>
 </p:sldLayout>
 </file>
 
@@ -3919,18 +3856,9 @@
   <p:clrMapOvr>
     <a:masterClrMapping/>
   </p:clrMapOvr>
-  <mc:AlternateContent xmlns:mc="http://schemas.openxmlformats.org/markup-compatibility/2006" xmlns:p14="http://schemas.microsoft.com/office/powerpoint/2010/main">
-    <mc:Choice Requires="p14">
-      <p:transition spd="med" p14:dur="700">
-        <p:fade/>
-      </p:transition>
-    </mc:Choice>
-    <mc:Fallback xmlns="">
-      <p:transition spd="med">
-        <p:fade/>
-      </p:transition>
-    </mc:Fallback>
-  </mc:AlternateContent>
+  <p:transition spd="slow">
+    <p:comb/>
+  </p:transition>
 </p:sldLayout>
 </file>
 
@@ -4084,18 +4012,9 @@
   <p:clrMapOvr>
     <a:masterClrMapping/>
   </p:clrMapOvr>
-  <mc:AlternateContent xmlns:mc="http://schemas.openxmlformats.org/markup-compatibility/2006" xmlns:p14="http://schemas.microsoft.com/office/powerpoint/2010/main">
-    <mc:Choice Requires="p14">
-      <p:transition spd="med" p14:dur="700">
-        <p:fade/>
-      </p:transition>
-    </mc:Choice>
-    <mc:Fallback xmlns="">
-      <p:transition spd="med">
-        <p:fade/>
-      </p:transition>
-    </mc:Fallback>
-  </mc:AlternateContent>
+  <p:transition spd="slow">
+    <p:comb/>
+  </p:transition>
 </p:sldLayout>
 </file>
 
@@ -4195,18 +4114,9 @@
   <p:clrMapOvr>
     <a:masterClrMapping/>
   </p:clrMapOvr>
-  <mc:AlternateContent xmlns:mc="http://schemas.openxmlformats.org/markup-compatibility/2006" xmlns:p14="http://schemas.microsoft.com/office/powerpoint/2010/main">
-    <mc:Choice Requires="p14">
-      <p:transition spd="med" p14:dur="700">
-        <p:fade/>
-      </p:transition>
-    </mc:Choice>
-    <mc:Fallback xmlns="">
-      <p:transition spd="med">
-        <p:fade/>
-      </p:transition>
-    </mc:Fallback>
-  </mc:AlternateContent>
+  <p:transition spd="slow">
+    <p:comb/>
+  </p:transition>
 </p:sldLayout>
 </file>
 
@@ -4494,18 +4404,9 @@
   <p:clrMapOvr>
     <a:masterClrMapping/>
   </p:clrMapOvr>
-  <mc:AlternateContent xmlns:mc="http://schemas.openxmlformats.org/markup-compatibility/2006" xmlns:p14="http://schemas.microsoft.com/office/powerpoint/2010/main">
-    <mc:Choice Requires="p14">
-      <p:transition spd="med" p14:dur="700">
-        <p:fade/>
-      </p:transition>
-    </mc:Choice>
-    <mc:Fallback xmlns="">
-      <p:transition spd="med">
-        <p:fade/>
-      </p:transition>
-    </mc:Fallback>
-  </mc:AlternateContent>
+  <p:transition spd="slow">
+    <p:comb/>
+  </p:transition>
 </p:sldLayout>
 </file>
 
@@ -4921,18 +4822,9 @@
     <p:sldLayoutId id="2147483658" r:id="rId10"/>
     <p:sldLayoutId id="2147483659" r:id="rId11"/>
   </p:sldLayoutIdLst>
-  <mc:AlternateContent xmlns:mc="http://schemas.openxmlformats.org/markup-compatibility/2006" xmlns:p14="http://schemas.microsoft.com/office/powerpoint/2010/main">
-    <mc:Choice Requires="p14">
-      <p:transition spd="med" p14:dur="700">
-        <p:fade/>
-      </p:transition>
-    </mc:Choice>
-    <mc:Fallback xmlns="">
-      <p:transition spd="med">
-        <p:fade/>
-      </p:transition>
-    </mc:Fallback>
-  </mc:AlternateContent>
+  <p:transition spd="slow">
+    <p:comb/>
+  </p:transition>
   <p:txStyles>
     <p:titleStyle>
       <a:lvl1pPr algn="l" defTabSz="914400" rtl="0">
@@ -5331,18 +5223,9 @@
   <p:clrMapOvr>
     <a:masterClrMapping/>
   </p:clrMapOvr>
-  <mc:AlternateContent xmlns:mc="http://schemas.openxmlformats.org/markup-compatibility/2006" xmlns:p14="http://schemas.microsoft.com/office/powerpoint/2010/main">
-    <mc:Choice Requires="p14">
-      <p:transition spd="med" p14:dur="700">
-        <p:fade/>
-      </p:transition>
-    </mc:Choice>
-    <mc:Fallback xmlns="">
-      <p:transition spd="med">
-        <p:fade/>
-      </p:transition>
-    </mc:Fallback>
-  </mc:AlternateContent>
+  <p:transition spd="slow">
+    <p:comb/>
+  </p:transition>
 </p:sld>
 </file>
 
@@ -5767,7 +5650,7 @@
           <a:lstStyle/>
           <a:p>
             <a:r>
-              <a:rPr lang="hu-HU" sz="2400">
+              <a:rPr lang="hu-HU" sz="2400" dirty="0">
                 <a:solidFill>
                   <a:srgbClr val="FFFFFF"/>
                 </a:solidFill>
@@ -5778,7 +5661,7 @@
               <a:t>A program futtatása közben ha a felhasználó értelmezhetetlen választ gépel akkor a program visszatér a funkcióválasztó menübe  </a:t>
             </a:r>
             <a:r>
-              <a:rPr sz="2400" i="0">
+              <a:rPr sz="2400" i="0" dirty="0">
                 <a:solidFill>
                   <a:srgbClr val="000000"/>
                 </a:solidFill>
@@ -5788,7 +5671,7 @@
               </a:rPr>
               <a:t>​</a:t>
             </a:r>
-            <a:endParaRPr lang="en-US">
+            <a:endParaRPr lang="en-US" dirty="0">
               <a:latin typeface="Calibri"/>
               <a:ea typeface="Calibri"/>
               <a:cs typeface="Calibri"/>
@@ -5796,7 +5679,7 @@
           </a:p>
           <a:p>
             <a:pPr algn="ctr"/>
-            <a:endParaRPr lang="en-US"/>
+            <a:endParaRPr lang="en-US" dirty="0"/>
           </a:p>
         </p:txBody>
       </p:sp>
@@ -5810,18 +5693,9 @@
   <p:clrMapOvr>
     <a:masterClrMapping/>
   </p:clrMapOvr>
-  <mc:AlternateContent xmlns:mc="http://schemas.openxmlformats.org/markup-compatibility/2006" xmlns:p14="http://schemas.microsoft.com/office/powerpoint/2010/main">
-    <mc:Choice Requires="p14">
-      <p:transition spd="med" p14:dur="700">
-        <p:fade/>
-      </p:transition>
-    </mc:Choice>
-    <mc:Fallback xmlns="">
-      <p:transition spd="med">
-        <p:fade/>
-      </p:transition>
-    </mc:Fallback>
-  </mc:AlternateContent>
+  <p:transition spd="slow">
+    <p:comb/>
+  </p:transition>
   <p:timing>
     <p:tnLst>
       <p:par>
@@ -6367,25 +6241,13 @@
           <a:p>
             <a:pPr algn="ctr"/>
             <a:r>
-              <a:rPr lang="hu-HU" u="sng" dirty="0">
+              <a:rPr lang="hu-HU" dirty="0">
                 <a:solidFill>
                   <a:schemeClr val="bg1"/>
                 </a:solidFill>
-                <a:hlinkClick r:id="rId4" action="ppaction://hlinksldjump">
-                  <a:extLst>
-                    <a:ext uri="{A12FA001-AC4F-418D-AE19-62706E023703}">
-                      <ahyp:hlinkClr xmlns:ahyp="http://schemas.microsoft.com/office/drawing/2018/hyperlinkcolor" val="tx"/>
-                    </a:ext>
-                  </a:extLst>
-                </a:hlinkClick>
               </a:rPr>
-              <a:t>Vissza 2. diára</a:t>
-            </a:r>
-            <a:endParaRPr lang="hu-HU" u="sng" dirty="0">
-              <a:solidFill>
-                <a:schemeClr val="bg1"/>
-              </a:solidFill>
-            </a:endParaRPr>
+              <a:t>Vissza a 2. diára</a:t>
+            </a:r>
           </a:p>
         </p:txBody>
       </p:sp>
@@ -6399,18 +6261,9 @@
   <p:clrMapOvr>
     <a:masterClrMapping/>
   </p:clrMapOvr>
-  <mc:AlternateContent xmlns:mc="http://schemas.openxmlformats.org/markup-compatibility/2006" xmlns:p14="http://schemas.microsoft.com/office/powerpoint/2010/main">
-    <mc:Choice Requires="p14">
-      <p:transition spd="med" p14:dur="700">
-        <p:fade/>
-      </p:transition>
-    </mc:Choice>
-    <mc:Fallback xmlns="">
-      <p:transition spd="med">
-        <p:fade/>
-      </p:transition>
-    </mc:Fallback>
-  </mc:AlternateContent>
+  <p:transition spd="slow">
+    <p:comb/>
+  </p:transition>
   <p:timing>
     <p:tnLst>
       <p:par>
@@ -6435,7 +6288,7 @@
                             </p:stCondLst>
                             <p:childTnLst>
                               <p:par>
-                                <p:cTn id="5" presetID="32" presetClass="emph" presetSubtype="0" fill="hold" grpId="0" nodeType="withEffect">
+                                <p:cTn id="5" presetID="32" presetClass="emph" presetSubtype="0" repeatCount="indefinite" fill="hold" grpId="0" nodeType="withEffect">
                                   <p:stCondLst>
                                     <p:cond delay="12000"/>
                                   </p:stCondLst>
@@ -6977,25 +6830,13 @@
           <a:p>
             <a:pPr algn="ctr"/>
             <a:r>
-              <a:rPr lang="hu-HU" u="sng">
+              <a:rPr lang="hu-HU" dirty="0">
                 <a:solidFill>
                   <a:schemeClr val="bg1"/>
                 </a:solidFill>
-                <a:hlinkClick r:id="rId3" action="ppaction://hlinksldjump">
-                  <a:extLst>
-                    <a:ext uri="{A12FA001-AC4F-418D-AE19-62706E023703}">
-                      <ahyp:hlinkClr xmlns:ahyp="http://schemas.microsoft.com/office/drawing/2018/hyperlinkcolor" val="tx"/>
-                    </a:ext>
-                  </a:extLst>
-                </a:hlinkClick>
               </a:rPr>
-              <a:t>Vissza 2. diára</a:t>
-            </a:r>
-            <a:endParaRPr lang="hu-HU" u="sng">
-              <a:solidFill>
-                <a:schemeClr val="bg1"/>
-              </a:solidFill>
-            </a:endParaRPr>
+              <a:t>Vissza a 2. diára</a:t>
+            </a:r>
           </a:p>
         </p:txBody>
       </p:sp>
@@ -7044,8 +6885,8 @@
         </p:nvSpPr>
         <p:spPr>
           <a:xfrm>
-            <a:off x="9476230" y="5677655"/>
-            <a:ext cx="2454896" cy="493150"/>
+            <a:off x="9457765" y="5594733"/>
+            <a:ext cx="2473361" cy="576072"/>
           </a:xfrm>
           <a:prstGeom prst="rightArrow">
             <a:avLst/>
@@ -7087,18 +6928,9 @@
   <p:clrMapOvr>
     <a:masterClrMapping/>
   </p:clrMapOvr>
-  <mc:AlternateContent xmlns:mc="http://schemas.openxmlformats.org/markup-compatibility/2006" xmlns:p14="http://schemas.microsoft.com/office/powerpoint/2010/main">
-    <mc:Choice Requires="p14">
-      <p:transition spd="med" p14:dur="700">
-        <p:fade/>
-      </p:transition>
-    </mc:Choice>
-    <mc:Fallback xmlns="">
-      <p:transition spd="med">
-        <p:fade/>
-      </p:transition>
-    </mc:Fallback>
-  </mc:AlternateContent>
+  <p:transition spd="slow">
+    <p:comb/>
+  </p:transition>
   <p:timing>
     <p:tnLst>
       <p:par>
@@ -7123,7 +6955,7 @@
                             </p:stCondLst>
                             <p:childTnLst>
                               <p:par>
-                                <p:cTn id="5" presetID="32" presetClass="emph" presetSubtype="0" fill="hold" grpId="0" nodeType="withEffect">
+                                <p:cTn id="5" presetID="32" presetClass="emph" presetSubtype="0" repeatCount="indefinite" fill="hold" grpId="0" nodeType="withEffect">
                                   <p:stCondLst>
                                     <p:cond delay="10000"/>
                                   </p:stCondLst>
@@ -7207,7 +7039,7 @@
                                 </p:cTn>
                               </p:par>
                               <p:par>
-                                <p:cTn id="11" presetID="32" presetClass="emph" presetSubtype="0" fill="hold" grpId="0" nodeType="withEffect">
+                                <p:cTn id="11" presetID="32" presetClass="emph" presetSubtype="0" repeatCount="indefinite" fill="hold" grpId="0" nodeType="withEffect">
                                   <p:stCondLst>
                                     <p:cond delay="10000"/>
                                   </p:stCondLst>
@@ -7527,25 +7359,13 @@
           <a:p>
             <a:pPr algn="ctr"/>
             <a:r>
-              <a:rPr lang="hu-HU" u="sng" dirty="0">
+              <a:rPr lang="hu-HU" dirty="0">
                 <a:solidFill>
                   <a:schemeClr val="bg1"/>
                 </a:solidFill>
-                <a:hlinkClick r:id="rId2" action="ppaction://hlinksldjump">
-                  <a:extLst>
-                    <a:ext uri="{A12FA001-AC4F-418D-AE19-62706E023703}">
-                      <ahyp:hlinkClr xmlns:ahyp="http://schemas.microsoft.com/office/drawing/2018/hyperlinkcolor" val="tx"/>
-                    </a:ext>
-                  </a:extLst>
-                </a:hlinkClick>
               </a:rPr>
               <a:t>Vissza 2. diára</a:t>
             </a:r>
-            <a:endParaRPr lang="hu-HU" u="sng" dirty="0">
-              <a:solidFill>
-                <a:schemeClr val="bg1"/>
-              </a:solidFill>
-            </a:endParaRPr>
           </a:p>
         </p:txBody>
       </p:sp>
@@ -7668,18 +7488,9 @@
   <p:clrMapOvr>
     <a:masterClrMapping/>
   </p:clrMapOvr>
-  <mc:AlternateContent xmlns:mc="http://schemas.openxmlformats.org/markup-compatibility/2006" xmlns:p14="http://schemas.microsoft.com/office/powerpoint/2010/main">
-    <mc:Choice Requires="p14">
-      <p:transition spd="med" p14:dur="700">
-        <p:fade/>
-      </p:transition>
-    </mc:Choice>
-    <mc:Fallback xmlns="">
-      <p:transition spd="med">
-        <p:fade/>
-      </p:transition>
-    </mc:Fallback>
-  </mc:AlternateContent>
+  <p:transition spd="slow">
+    <p:comb/>
+  </p:transition>
   <p:timing>
     <p:tnLst>
       <p:par>
@@ -7704,7 +7515,7 @@
                             </p:stCondLst>
                             <p:childTnLst>
                               <p:par>
-                                <p:cTn id="5" presetID="32" presetClass="emph" presetSubtype="0" fill="hold" grpId="0" nodeType="withEffect">
+                                <p:cTn id="5" presetID="32" presetClass="emph" presetSubtype="0" repeatCount="indefinite" fill="hold" grpId="0" nodeType="withEffect">
                                   <p:stCondLst>
                                     <p:cond delay="10000"/>
                                   </p:stCondLst>
@@ -7963,25 +7774,13 @@
           <a:p>
             <a:pPr algn="ctr"/>
             <a:r>
-              <a:rPr lang="hu-HU" u="sng" dirty="0">
+              <a:rPr lang="hu-HU" dirty="0">
                 <a:solidFill>
                   <a:schemeClr val="bg1"/>
                 </a:solidFill>
-                <a:hlinkClick r:id="rId2" action="ppaction://hlinksldjump">
-                  <a:extLst>
-                    <a:ext uri="{A12FA001-AC4F-418D-AE19-62706E023703}">
-                      <ahyp:hlinkClr xmlns:ahyp="http://schemas.microsoft.com/office/drawing/2018/hyperlinkcolor" val="tx"/>
-                    </a:ext>
-                  </a:extLst>
-                </a:hlinkClick>
               </a:rPr>
               <a:t>Vissza 2. diára</a:t>
             </a:r>
-            <a:endParaRPr lang="hu-HU" u="sng" dirty="0">
-              <a:solidFill>
-                <a:schemeClr val="bg1"/>
-              </a:solidFill>
-            </a:endParaRPr>
           </a:p>
         </p:txBody>
       </p:sp>
@@ -7995,18 +7794,9 @@
   <p:clrMapOvr>
     <a:masterClrMapping/>
   </p:clrMapOvr>
-  <mc:AlternateContent xmlns:mc="http://schemas.openxmlformats.org/markup-compatibility/2006" xmlns:p14="http://schemas.microsoft.com/office/powerpoint/2010/main">
-    <mc:Choice Requires="p14">
-      <p:transition spd="med" p14:dur="700">
-        <p:fade/>
-      </p:transition>
-    </mc:Choice>
-    <mc:Fallback xmlns="">
-      <p:transition spd="med">
-        <p:fade/>
-      </p:transition>
-    </mc:Fallback>
-  </mc:AlternateContent>
+  <p:transition spd="slow">
+    <p:comb/>
+  </p:transition>
   <p:timing>
     <p:tnLst>
       <p:par>
@@ -8031,7 +7821,7 @@
                             </p:stCondLst>
                             <p:childTnLst>
                               <p:par>
-                                <p:cTn id="5" presetID="32" presetClass="emph" presetSubtype="0" fill="hold" grpId="0" nodeType="withEffect">
+                                <p:cTn id="5" presetID="32" presetClass="emph" presetSubtype="0" repeatCount="indefinite" fill="hold" grpId="0" nodeType="withEffect">
                                   <p:stCondLst>
                                     <p:cond delay="3000"/>
                                   </p:stCondLst>
